--- a/Actividad 3.2 Reporte De Practica_JoseGomez_Sim_5SM.pptx
+++ b/Actividad 3.2 Reporte De Practica_JoseGomez_Sim_5SM.pptx
@@ -21722,6 +21722,40 @@
               <a:t>ANEXO ENLACE GIT</a:t>
             </a:r>
             <a:endParaRPr lang="es-MX" altLang="en-US"/>
+          </a:p>
+        </p:txBody>
+      </p:sp>
+      <p:sp>
+        <p:nvSpPr>
+          <p:cNvPr id="3" name="Cuadro de texto 2"/>
+          <p:cNvSpPr txBox="1"/>
+          <p:nvPr/>
+        </p:nvSpPr>
+        <p:spPr>
+          <a:xfrm>
+            <a:off x="1318260" y="1146810"/>
+            <a:ext cx="5907405" cy="645160"/>
+          </a:xfrm>
+          <a:prstGeom prst="rect">
+            <a:avLst/>
+          </a:prstGeom>
+          <a:noFill/>
+        </p:spPr>
+        <p:txBody>
+          <a:bodyPr wrap="square" rtlCol="0">
+            <a:spAutoFit/>
+          </a:bodyPr>
+          <a:p>
+            <a:r>
+              <a:rPr lang="en-US" altLang="es-MX">
+                <a:hlinkClick r:id="rId1" action="ppaction://hlinkfile"/>
+              </a:rPr>
+              <a:t>https://github.com/angelmalu18/Sim-Tema_3-180926.git</a:t>
+            </a:r>
+            <a:endParaRPr lang="en-US" altLang="es-MX"/>
+          </a:p>
+          <a:p>
+            <a:endParaRPr lang="en-US" altLang="es-MX"/>
           </a:p>
         </p:txBody>
       </p:sp>

--- a/Actividad 3.2 Reporte De Practica_JoseGomez_Sim_5SM.pptx
+++ b/Actividad 3.2 Reporte De Practica_JoseGomez_Sim_5SM.pptx
@@ -4395,6 +4395,17 @@
               <a:buNone/>
             </a:pPr>
             <a:r>
+              <a:rPr lang="es-MX" altLang="en-US" sz="1200" dirty="0">
+                <a:solidFill>
+                  <a:schemeClr val="tx1"/>
+                </a:solidFill>
+                <a:latin typeface="Calibri" panose="020F0502020204030204" pitchFamily="34" charset="0"/>
+                <a:ea typeface="Calibri" panose="020F0502020204030204" pitchFamily="34" charset="-122"/>
+                <a:cs typeface="Calibri" panose="020F0502020204030204" pitchFamily="34" charset="-120"/>
+              </a:rPr>
+              <a:t>09</a:t>
+            </a:r>
+            <a:r>
               <a:rPr lang="en-US" sz="1200" dirty="0">
                 <a:solidFill>
                   <a:schemeClr val="tx1"/>
@@ -4403,7 +4414,7 @@
                 <a:ea typeface="Calibri" panose="020F0502020204030204" pitchFamily="34" charset="-122"/>
                 <a:cs typeface="Calibri" panose="020F0502020204030204" pitchFamily="34" charset="-120"/>
               </a:rPr>
-              <a:t>18 de septiembre de 2026  ·  Venustiano Carranza, Chiapas</a:t>
+              <a:t> de septiembre de 2026  ·  Venustiano Carranza, Chiapas</a:t>
             </a:r>
             <a:endParaRPr lang="en-US" sz="1200" dirty="0">
               <a:solidFill>
